--- a/metro/metro-s08-contact-me.pptx
+++ b/metro/metro-s08-contact-me.pptx
@@ -3734,9 +3734,9 @@
                 <a:solidFill>
                   <a:srgbClr val="FFFFFF"/>
                 </a:solidFill>
-                <a:latin typeface="Space Grotesk"/>
-                <a:ea typeface="Space Grotesk"/>
-                <a:cs typeface="Space Grotesk"/>
+                <a:latin typeface="HK Grotesk"/>
+                <a:ea typeface="HK Grotesk"/>
+                <a:cs typeface="HK Grotesk"/>
               </a:rPr>
               <a:t>NO</a:t>
             </a:r>
@@ -3843,9 +3843,9 @@
                 <a:solidFill>
                   <a:srgbClr val="FFFFFF"/>
                 </a:solidFill>
-                <a:latin typeface="Space Grotesk"/>
-                <a:ea typeface="Space Grotesk"/>
-                <a:cs typeface="Space Grotesk"/>
+                <a:latin typeface="HK Grotesk"/>
+                <a:ea typeface="HK Grotesk"/>
+                <a:cs typeface="HK Grotesk"/>
               </a:rPr>
               <a:t>Let’s talk</a:t>
             </a:r>
@@ -3882,9 +3882,9 @@
                 <a:solidFill>
                   <a:srgbClr val="FFFFFF"/>
                 </a:solidFill>
-                <a:latin typeface="Space Grotesk"/>
-                <a:ea typeface="Space Grotesk"/>
-                <a:cs typeface="Space Grotesk"/>
+                <a:latin typeface="HK Grotesk"/>
+                <a:ea typeface="HK Grotesk"/>
+                <a:cs typeface="HK Grotesk"/>
               </a:rPr>
               <a:t>about home.</a:t>
             </a:r>
@@ -3952,9 +3952,9 @@
                 <a:solidFill>
                   <a:srgbClr val="FFFFFF"/>
                 </a:solidFill>
-                <a:latin typeface="Space Grotesk"/>
-                <a:ea typeface="Space Grotesk"/>
-                <a:cs typeface="Space Grotesk"/>
+                <a:latin typeface="HK Grotesk"/>
+                <a:ea typeface="HK Grotesk"/>
+                <a:cs typeface="HK Grotesk"/>
               </a:rPr>
               <a:t>312 · 555 · 0148</a:t>
             </a:r>
@@ -4022,9 +4022,9 @@
                 <a:solidFill>
                   <a:srgbClr val="FFFFFF"/>
                 </a:solidFill>
-                <a:latin typeface="Space Grotesk"/>
-                <a:ea typeface="Space Grotesk"/>
-                <a:cs typeface="Space Grotesk"/>
+                <a:latin typeface="HK Grotesk"/>
+                <a:ea typeface="HK Grotesk"/>
+                <a:cs typeface="HK Grotesk"/>
               </a:rPr>
               <a:t>julian@northandoak.co</a:t>
             </a:r>
@@ -4092,9 +4092,9 @@
                 <a:solidFill>
                   <a:srgbClr val="FFFFFF"/>
                 </a:solidFill>
-                <a:latin typeface="Space Grotesk"/>
-                <a:ea typeface="Space Grotesk"/>
-                <a:cs typeface="Space Grotesk"/>
+                <a:latin typeface="HK Grotesk"/>
+                <a:ea typeface="HK Grotesk"/>
+                <a:cs typeface="HK Grotesk"/>
               </a:rPr>
               <a:t>@northandoak</a:t>
             </a:r>
@@ -4162,9 +4162,9 @@
                 <a:solidFill>
                   <a:srgbClr val="FFFFFF"/>
                 </a:solidFill>
-                <a:latin typeface="Space Grotesk"/>
-                <a:ea typeface="Space Grotesk"/>
-                <a:cs typeface="Space Grotesk"/>
+                <a:latin typeface="HK Grotesk"/>
+                <a:ea typeface="HK Grotesk"/>
+                <a:cs typeface="HK Grotesk"/>
               </a:rPr>
               <a:t>northandoak.co</a:t>
             </a:r>
@@ -4201,9 +4201,9 @@
                 <a:solidFill>
                   <a:srgbClr val="FFFFFF"/>
                 </a:solidFill>
-                <a:latin typeface="Space Grotesk"/>
-                <a:ea typeface="Space Grotesk"/>
-                <a:cs typeface="Space Grotesk"/>
+                <a:latin typeface="HK Grotesk"/>
+                <a:ea typeface="HK Grotesk"/>
+                <a:cs typeface="HK Grotesk"/>
               </a:rPr>
               <a:t>Julian Reyes</a:t>
             </a:r>
@@ -4271,9 +4271,9 @@
                 <a:solidFill>
                   <a:srgbClr val="FFFFFF"/>
                 </a:solidFill>
-                <a:latin typeface="Space Grotesk"/>
-                <a:ea typeface="Space Grotesk"/>
-                <a:cs typeface="Space Grotesk"/>
+                <a:latin typeface="HK Grotesk"/>
+                <a:ea typeface="HK Grotesk"/>
+                <a:cs typeface="HK Grotesk"/>
               </a:rPr>
               <a:t>Send a DM</a:t>
             </a:r>
@@ -4306,9 +4306,9 @@
                 <a:solidFill>
                   <a:srgbClr val="2D5BE3"/>
                 </a:solidFill>
-                <a:latin typeface="Space Grotesk"/>
-                <a:ea typeface="Space Grotesk"/>
-                <a:cs typeface="Space Grotesk"/>
+                <a:latin typeface="HK Grotesk"/>
+                <a:ea typeface="HK Grotesk"/>
+                <a:cs typeface="HK Grotesk"/>
               </a:rPr>
               <a:t>↗</a:t>
             </a:r>

--- a/metro/metro-s08-contact-me.pptx
+++ b/metro/metro-s08-contact-me.pptx
@@ -3316,7 +3316,7 @@
         </p:nvSpPr>
         <p:spPr>
           <a:xfrm>
-            <a:off x="762000" y="6769596"/>
+            <a:off x="762000" y="7045821"/>
             <a:ext cx="8763000" cy="9525"/>
           </a:xfrm>
           <a:prstGeom prst="rect">
@@ -3360,7 +3360,7 @@
         </p:nvSpPr>
         <p:spPr>
           <a:xfrm>
-            <a:off x="762000" y="7522071"/>
+            <a:off x="762000" y="7979271"/>
             <a:ext cx="8763000" cy="9525"/>
           </a:xfrm>
           <a:prstGeom prst="rect">
@@ -3404,7 +3404,7 @@
         </p:nvSpPr>
         <p:spPr>
           <a:xfrm>
-            <a:off x="762000" y="8274546"/>
+            <a:off x="762000" y="8912721"/>
             <a:ext cx="8763000" cy="9525"/>
           </a:xfrm>
           <a:prstGeom prst="rect">
@@ -3448,7 +3448,7 @@
         </p:nvSpPr>
         <p:spPr>
           <a:xfrm>
-            <a:off x="762000" y="9027021"/>
+            <a:off x="762000" y="9846171"/>
             <a:ext cx="8763000" cy="9525"/>
           </a:xfrm>
           <a:prstGeom prst="rect">
@@ -3492,7 +3492,7 @@
         </p:nvSpPr>
         <p:spPr>
           <a:xfrm>
-            <a:off x="762000" y="15735300"/>
+            <a:off x="762000" y="15525750"/>
             <a:ext cx="8763000" cy="9525"/>
           </a:xfrm>
           <a:prstGeom prst="rect">
@@ -3580,8 +3580,8 @@
         </p:nvSpPr>
         <p:spPr>
           <a:xfrm>
-            <a:off x="762000" y="15735300"/>
-            <a:ext cx="9525" cy="647700"/>
+            <a:off x="762000" y="15525750"/>
+            <a:ext cx="9525" cy="857250"/>
           </a:xfrm>
           <a:prstGeom prst="rect">
             <a:avLst/>
@@ -3624,8 +3624,8 @@
         </p:nvSpPr>
         <p:spPr>
           <a:xfrm>
-            <a:off x="9515475" y="15735300"/>
-            <a:ext cx="9525" cy="647700"/>
+            <a:off x="9515475" y="15525750"/>
+            <a:ext cx="9525" cy="857250"/>
           </a:xfrm>
           <a:prstGeom prst="rect">
             <a:avLst/>
@@ -3668,7 +3668,7 @@
         </p:nvSpPr>
         <p:spPr>
           <a:xfrm>
-            <a:off x="1024416" y="16012004"/>
+            <a:off x="1081566" y="15907229"/>
             <a:ext cx="94293" cy="94292"/>
           </a:xfrm>
           <a:prstGeom prst="rect">
@@ -3734,9 +3734,9 @@
                 <a:solidFill>
                   <a:srgbClr val="FFFFFF"/>
                 </a:solidFill>
-                <a:latin typeface="HK Grotesk"/>
-                <a:ea typeface="HK Grotesk"/>
-                <a:cs typeface="HK Grotesk"/>
+                <a:latin typeface="Space Grotesk"/>
+                <a:ea typeface="Space Grotesk"/>
+                <a:cs typeface="Space Grotesk"/>
               </a:rPr>
               <a:t>NO</a:t>
             </a:r>
@@ -3751,8 +3751,8 @@
         </p:nvSpPr>
         <p:spPr>
           <a:xfrm>
-            <a:off x="7943999" y="938212"/>
-            <a:ext cx="2910602" cy="104775"/>
+            <a:off x="6995517" y="900112"/>
+            <a:ext cx="4428172" cy="180975"/>
           </a:xfrm>
           <a:prstGeom prst="rect">
             <a:avLst/>
@@ -3765,7 +3765,7 @@
           <a:p>
             <a:pPr algn="l"/>
             <a:r>
-              <a:rPr sz="750" i="0" b="0" spc="240">
+              <a:rPr sz="1200" i="0" b="0" spc="384">
                 <a:solidFill>
                   <a:srgbClr val="A1A2A3"/>
                 </a:solidFill>
@@ -3787,7 +3787,7 @@
         <p:spPr>
           <a:xfrm>
             <a:off x="762000" y="3238500"/>
-            <a:ext cx="14401800" cy="133350"/>
+            <a:ext cx="14401800" cy="228600"/>
           </a:xfrm>
           <a:prstGeom prst="rect">
             <a:avLst/>
@@ -3800,7 +3800,7 @@
           <a:p>
             <a:pPr algn="l"/>
             <a:r>
-              <a:rPr sz="900" i="0" b="0" spc="324">
+              <a:rPr sz="1575" i="0" b="0" spc="472">
                 <a:solidFill>
                   <a:srgbClr val="2D5BE3"/>
                 </a:solidFill>
@@ -3821,7 +3821,7 @@
         </p:nvSpPr>
         <p:spPr>
           <a:xfrm>
-            <a:off x="762000" y="3457575"/>
+            <a:off x="762000" y="3552825"/>
             <a:ext cx="6796564" cy="1152525"/>
           </a:xfrm>
           <a:prstGeom prst="rect">
@@ -3843,9 +3843,9 @@
                 <a:solidFill>
                   <a:srgbClr val="FFFFFF"/>
                 </a:solidFill>
-                <a:latin typeface="HK Grotesk"/>
-                <a:ea typeface="HK Grotesk"/>
-                <a:cs typeface="HK Grotesk"/>
+                <a:latin typeface="Space Grotesk"/>
+                <a:ea typeface="Space Grotesk"/>
+                <a:cs typeface="Space Grotesk"/>
               </a:rPr>
               <a:t>Let’s talk</a:t>
             </a:r>
@@ -3860,7 +3860,7 @@
         </p:nvSpPr>
         <p:spPr>
           <a:xfrm>
-            <a:off x="762000" y="4403973"/>
+            <a:off x="762000" y="4499223"/>
             <a:ext cx="9440704" cy="1152525"/>
           </a:xfrm>
           <a:prstGeom prst="rect">
@@ -3882,9 +3882,9 @@
                 <a:solidFill>
                   <a:srgbClr val="FFFFFF"/>
                 </a:solidFill>
-                <a:latin typeface="HK Grotesk"/>
-                <a:ea typeface="HK Grotesk"/>
-                <a:cs typeface="HK Grotesk"/>
+                <a:latin typeface="Space Grotesk"/>
+                <a:ea typeface="Space Grotesk"/>
+                <a:cs typeface="Space Grotesk"/>
               </a:rPr>
               <a:t>about home.</a:t>
             </a:r>
@@ -3899,8 +3899,8 @@
         </p:nvSpPr>
         <p:spPr>
           <a:xfrm>
-            <a:off x="762000" y="6398121"/>
-            <a:ext cx="999411" cy="123825"/>
+            <a:off x="762000" y="6569571"/>
+            <a:ext cx="1280398" cy="180975"/>
           </a:xfrm>
           <a:prstGeom prst="rect">
             <a:avLst/>
@@ -3913,7 +3913,7 @@
           <a:p>
             <a:pPr algn="l"/>
             <a:r>
-              <a:rPr sz="825" i="0" b="0" spc="264">
+              <a:rPr sz="1200" i="0" b="0" spc="384">
                 <a:solidFill>
                   <a:srgbClr val="2D5BE3"/>
                 </a:solidFill>
@@ -3934,8 +3934,8 @@
         </p:nvSpPr>
         <p:spPr>
           <a:xfrm>
-            <a:off x="7427863" y="6236196"/>
-            <a:ext cx="3736419" cy="323850"/>
+            <a:off x="6728817" y="6369546"/>
+            <a:ext cx="4854892" cy="428625"/>
           </a:xfrm>
           <a:prstGeom prst="rect">
             <a:avLst/>
@@ -3948,13 +3948,13 @@
           <a:p>
             <a:pPr algn="l"/>
             <a:r>
-              <a:rPr sz="2250" i="0" b="0">
+              <a:rPr sz="3000" i="0" b="0">
                 <a:solidFill>
                   <a:srgbClr val="FFFFFF"/>
                 </a:solidFill>
-                <a:latin typeface="HK Grotesk"/>
-                <a:ea typeface="HK Grotesk"/>
-                <a:cs typeface="HK Grotesk"/>
+                <a:latin typeface="Space Grotesk"/>
+                <a:ea typeface="Space Grotesk"/>
+                <a:cs typeface="Space Grotesk"/>
               </a:rPr>
               <a:t>312 · 555 · 0148</a:t>
             </a:r>
@@ -3969,8 +3969,8 @@
         </p:nvSpPr>
         <p:spPr>
           <a:xfrm>
-            <a:off x="762000" y="7150596"/>
-            <a:ext cx="1153954" cy="123825"/>
+            <a:off x="762000" y="7503021"/>
+            <a:ext cx="1505188" cy="180975"/>
           </a:xfrm>
           <a:prstGeom prst="rect">
             <a:avLst/>
@@ -3983,7 +3983,7 @@
           <a:p>
             <a:pPr algn="l"/>
             <a:r>
-              <a:rPr sz="825" i="0" b="0" spc="264">
+              <a:rPr sz="1200" i="0" b="0" spc="384">
                 <a:solidFill>
                   <a:srgbClr val="2D5BE3"/>
                 </a:solidFill>
@@ -4004,8 +4004,8 @@
         </p:nvSpPr>
         <p:spPr>
           <a:xfrm>
-            <a:off x="6597700" y="6988671"/>
-            <a:ext cx="5064681" cy="323850"/>
+            <a:off x="5621982" y="7302996"/>
+            <a:ext cx="6625828" cy="428625"/>
           </a:xfrm>
           <a:prstGeom prst="rect">
             <a:avLst/>
@@ -4018,13 +4018,13 @@
           <a:p>
             <a:pPr algn="l"/>
             <a:r>
-              <a:rPr sz="2250" i="0" b="0">
+              <a:rPr sz="3000" i="0" b="0">
                 <a:solidFill>
                   <a:srgbClr val="FFFFFF"/>
                 </a:solidFill>
-                <a:latin typeface="HK Grotesk"/>
-                <a:ea typeface="HK Grotesk"/>
-                <a:cs typeface="HK Grotesk"/>
+                <a:latin typeface="Space Grotesk"/>
+                <a:ea typeface="Space Grotesk"/>
+                <a:cs typeface="Space Grotesk"/>
               </a:rPr>
               <a:t>julian@northandoak.co</a:t>
             </a:r>
@@ -4039,8 +4039,8 @@
         </p:nvSpPr>
         <p:spPr>
           <a:xfrm>
-            <a:off x="762000" y="7903071"/>
-            <a:ext cx="690324" cy="123825"/>
+            <a:off x="762000" y="8436471"/>
+            <a:ext cx="830818" cy="180975"/>
           </a:xfrm>
           <a:prstGeom prst="rect">
             <a:avLst/>
@@ -4053,7 +4053,7 @@
           <a:p>
             <a:pPr algn="l"/>
             <a:r>
-              <a:rPr sz="825" i="0" b="0" spc="264">
+              <a:rPr sz="1200" i="0" b="0" spc="384">
                 <a:solidFill>
                   <a:srgbClr val="2D5BE3"/>
                 </a:solidFill>
@@ -4074,8 +4074,8 @@
         </p:nvSpPr>
         <p:spPr>
           <a:xfrm>
-            <a:off x="7646045" y="7741146"/>
-            <a:ext cx="3387328" cy="323850"/>
+            <a:off x="7019776" y="8236446"/>
+            <a:ext cx="4389358" cy="428625"/>
           </a:xfrm>
           <a:prstGeom prst="rect">
             <a:avLst/>
@@ -4088,13 +4088,13 @@
           <a:p>
             <a:pPr algn="l"/>
             <a:r>
-              <a:rPr sz="2250" i="0" b="0">
+              <a:rPr sz="3000" i="0" b="0">
                 <a:solidFill>
                   <a:srgbClr val="FFFFFF"/>
                 </a:solidFill>
-                <a:latin typeface="HK Grotesk"/>
-                <a:ea typeface="HK Grotesk"/>
-                <a:cs typeface="HK Grotesk"/>
+                <a:latin typeface="Space Grotesk"/>
+                <a:ea typeface="Space Grotesk"/>
+                <a:cs typeface="Space Grotesk"/>
               </a:rPr>
               <a:t>@northandoak</a:t>
             </a:r>
@@ -4109,8 +4109,8 @@
         </p:nvSpPr>
         <p:spPr>
           <a:xfrm>
-            <a:off x="762000" y="8655546"/>
-            <a:ext cx="844868" cy="123825"/>
+            <a:off x="762000" y="9369921"/>
+            <a:ext cx="1055608" cy="180975"/>
           </a:xfrm>
           <a:prstGeom prst="rect">
             <a:avLst/>
@@ -4123,7 +4123,7 @@
           <a:p>
             <a:pPr algn="l"/>
             <a:r>
-              <a:rPr sz="825" i="0" b="0" spc="264">
+              <a:rPr sz="1200" i="0" b="0" spc="384">
                 <a:solidFill>
                   <a:srgbClr val="2D5BE3"/>
                 </a:solidFill>
@@ -4144,8 +4144,8 @@
         </p:nvSpPr>
         <p:spPr>
           <a:xfrm>
-            <a:off x="7554962" y="8493621"/>
-            <a:ext cx="3533061" cy="323850"/>
+            <a:off x="6898332" y="9169896"/>
+            <a:ext cx="4583668" cy="428625"/>
           </a:xfrm>
           <a:prstGeom prst="rect">
             <a:avLst/>
@@ -4158,13 +4158,13 @@
           <a:p>
             <a:pPr algn="l"/>
             <a:r>
-              <a:rPr sz="2250" i="0" b="0">
+              <a:rPr sz="3000" i="0" b="0">
                 <a:solidFill>
                   <a:srgbClr val="FFFFFF"/>
                 </a:solidFill>
-                <a:latin typeface="HK Grotesk"/>
-                <a:ea typeface="HK Grotesk"/>
-                <a:cs typeface="HK Grotesk"/>
+                <a:latin typeface="Space Grotesk"/>
+                <a:ea typeface="Space Grotesk"/>
+                <a:cs typeface="Space Grotesk"/>
               </a:rPr>
               <a:t>northandoak.co</a:t>
             </a:r>
@@ -4179,8 +4179,8 @@
         </p:nvSpPr>
         <p:spPr>
           <a:xfrm>
-            <a:off x="-4876800" y="9322296"/>
-            <a:ext cx="14401800" cy="209550"/>
+            <a:off x="-4876800" y="10198596"/>
+            <a:ext cx="14401800" cy="285750"/>
           </a:xfrm>
           <a:prstGeom prst="rect">
             <a:avLst/>
@@ -4197,13 +4197,13 @@
               </a:lnSpc>
             </a:pPr>
             <a:r>
-              <a:rPr sz="1650" i="0" b="1" spc="33">
+              <a:rPr sz="2250" i="0" b="1" spc="45">
                 <a:solidFill>
                   <a:srgbClr val="FFFFFF"/>
                 </a:solidFill>
-                <a:latin typeface="HK Grotesk"/>
-                <a:ea typeface="HK Grotesk"/>
-                <a:cs typeface="HK Grotesk"/>
+                <a:latin typeface="Space Grotesk"/>
+                <a:ea typeface="Space Grotesk"/>
+                <a:cs typeface="Space Grotesk"/>
               </a:rPr>
               <a:t>Julian Reyes</a:t>
             </a:r>
@@ -4218,8 +4218,8 @@
         </p:nvSpPr>
         <p:spPr>
           <a:xfrm>
-            <a:off x="-4876800" y="9588996"/>
-            <a:ext cx="14401800" cy="104775"/>
+            <a:off x="-4876800" y="10560546"/>
+            <a:ext cx="14401800" cy="180975"/>
           </a:xfrm>
           <a:prstGeom prst="rect">
             <a:avLst/>
@@ -4232,7 +4232,7 @@
           <a:p>
             <a:pPr algn="r"/>
             <a:r>
-              <a:rPr sz="750" i="0" b="0" spc="240">
+              <a:rPr sz="1200" i="0" b="0" spc="384">
                 <a:solidFill>
                   <a:srgbClr val="B8B9BA"/>
                 </a:solidFill>
@@ -4253,8 +4253,8 @@
         </p:nvSpPr>
         <p:spPr>
           <a:xfrm>
-            <a:off x="1238250" y="15978188"/>
-            <a:ext cx="1590913" cy="161925"/>
+            <a:off x="1314450" y="15825788"/>
+            <a:ext cx="2235994" cy="257175"/>
           </a:xfrm>
           <a:prstGeom prst="rect">
             <a:avLst/>
@@ -4267,13 +4267,13 @@
           <a:p>
             <a:pPr algn="l"/>
             <a:r>
-              <a:rPr sz="1125" i="0" b="1" spc="22">
+              <a:rPr sz="1725" i="0" b="1" spc="34">
                 <a:solidFill>
                   <a:srgbClr val="FFFFFF"/>
                 </a:solidFill>
-                <a:latin typeface="HK Grotesk"/>
-                <a:ea typeface="HK Grotesk"/>
-                <a:cs typeface="HK Grotesk"/>
+                <a:latin typeface="Space Grotesk"/>
+                <a:ea typeface="Space Grotesk"/>
+                <a:cs typeface="Space Grotesk"/>
               </a:rPr>
               <a:t>Send a DM</a:t>
             </a:r>
@@ -4288,8 +4288,8 @@
         </p:nvSpPr>
         <p:spPr>
           <a:xfrm>
-            <a:off x="9105900" y="15954375"/>
-            <a:ext cx="609600" cy="209550"/>
+            <a:off x="9001125" y="15821025"/>
+            <a:ext cx="685800" cy="266700"/>
           </a:xfrm>
           <a:prstGeom prst="rect">
             <a:avLst/>
@@ -4302,13 +4302,13 @@
           <a:p>
             <a:pPr algn="l"/>
             <a:r>
-              <a:rPr sz="1350" i="0" b="0">
+              <a:rPr sz="1800" i="0" b="0">
                 <a:solidFill>
                   <a:srgbClr val="2D5BE3"/>
                 </a:solidFill>
-                <a:latin typeface="HK Grotesk"/>
-                <a:ea typeface="HK Grotesk"/>
-                <a:cs typeface="HK Grotesk"/>
+                <a:latin typeface="Space Grotesk"/>
+                <a:ea typeface="Space Grotesk"/>
+                <a:cs typeface="Space Grotesk"/>
               </a:rPr>
               <a:t>↗</a:t>
             </a:r>
@@ -4323,8 +4323,8 @@
         </p:nvSpPr>
         <p:spPr>
           <a:xfrm>
-            <a:off x="2557031" y="17297400"/>
-            <a:ext cx="5172789" cy="123825"/>
+            <a:off x="1468041" y="17249775"/>
+            <a:ext cx="7350919" cy="180975"/>
           </a:xfrm>
           <a:prstGeom prst="rect">
             <a:avLst/>
@@ -4337,7 +4337,7 @@
           <a:p>
             <a:pPr algn="ctr"/>
             <a:r>
-              <a:rPr sz="825" i="0" b="0" spc="264">
+              <a:rPr sz="1200" i="0" b="0" spc="384">
                 <a:solidFill>
                   <a:srgbClr val="B8B9BA"/>
                 </a:solidFill>

--- a/metro/metro-s08-contact-me.pptx
+++ b/metro/metro-s08-contact-me.pptx
@@ -3316,7 +3316,7 @@
         </p:nvSpPr>
         <p:spPr>
           <a:xfrm>
-            <a:off x="762000" y="7045821"/>
+            <a:off x="762000" y="7055346"/>
             <a:ext cx="8763000" cy="9525"/>
           </a:xfrm>
           <a:prstGeom prst="rect">
@@ -3360,7 +3360,7 @@
         </p:nvSpPr>
         <p:spPr>
           <a:xfrm>
-            <a:off x="762000" y="7979271"/>
+            <a:off x="762000" y="7988796"/>
             <a:ext cx="8763000" cy="9525"/>
           </a:xfrm>
           <a:prstGeom prst="rect">
@@ -3404,7 +3404,7 @@
         </p:nvSpPr>
         <p:spPr>
           <a:xfrm>
-            <a:off x="762000" y="8912721"/>
+            <a:off x="762000" y="8922246"/>
             <a:ext cx="8763000" cy="9525"/>
           </a:xfrm>
           <a:prstGeom prst="rect">
@@ -3448,7 +3448,7 @@
         </p:nvSpPr>
         <p:spPr>
           <a:xfrm>
-            <a:off x="762000" y="9846171"/>
+            <a:off x="762000" y="9855696"/>
             <a:ext cx="8763000" cy="9525"/>
           </a:xfrm>
           <a:prstGeom prst="rect">
@@ -3492,7 +3492,7 @@
         </p:nvSpPr>
         <p:spPr>
           <a:xfrm>
-            <a:off x="762000" y="15525750"/>
+            <a:off x="762000" y="15478125"/>
             <a:ext cx="8763000" cy="9525"/>
           </a:xfrm>
           <a:prstGeom prst="rect">
@@ -3580,8 +3580,8 @@
         </p:nvSpPr>
         <p:spPr>
           <a:xfrm>
-            <a:off x="762000" y="15525750"/>
-            <a:ext cx="9525" cy="857250"/>
+            <a:off x="762000" y="15478125"/>
+            <a:ext cx="9525" cy="904875"/>
           </a:xfrm>
           <a:prstGeom prst="rect">
             <a:avLst/>
@@ -3624,8 +3624,8 @@
         </p:nvSpPr>
         <p:spPr>
           <a:xfrm>
-            <a:off x="9515475" y="15525750"/>
-            <a:ext cx="9525" cy="857250"/>
+            <a:off x="9515475" y="15478125"/>
+            <a:ext cx="9525" cy="904875"/>
           </a:xfrm>
           <a:prstGeom prst="rect">
             <a:avLst/>
@@ -3668,7 +3668,7 @@
         </p:nvSpPr>
         <p:spPr>
           <a:xfrm>
-            <a:off x="1081566" y="15907229"/>
+            <a:off x="1081566" y="15883417"/>
             <a:ext cx="94293" cy="94292"/>
           </a:xfrm>
           <a:prstGeom prst="rect">
@@ -3712,8 +3712,8 @@
         </p:nvSpPr>
         <p:spPr>
           <a:xfrm>
-            <a:off x="873175" y="914400"/>
-            <a:ext cx="756523" cy="152400"/>
+            <a:off x="851148" y="900112"/>
+            <a:ext cx="827008" cy="180975"/>
           </a:xfrm>
           <a:prstGeom prst="rect">
             <a:avLst/>
@@ -3730,7 +3730,7 @@
               </a:lnSpc>
             </a:pPr>
             <a:r>
-              <a:rPr sz="1200" i="0" b="1" spc="24">
+              <a:rPr sz="1425" i="0" b="1" spc="28">
                 <a:solidFill>
                   <a:srgbClr val="FFFFFF"/>
                 </a:solidFill>
@@ -3751,8 +3751,8 @@
         </p:nvSpPr>
         <p:spPr>
           <a:xfrm>
-            <a:off x="6995517" y="900112"/>
-            <a:ext cx="4428172" cy="180975"/>
+            <a:off x="6521351" y="885825"/>
+            <a:ext cx="5186839" cy="209550"/>
           </a:xfrm>
           <a:prstGeom prst="rect">
             <a:avLst/>
@@ -3765,7 +3765,7 @@
           <a:p>
             <a:pPr algn="l"/>
             <a:r>
-              <a:rPr sz="1200" i="0" b="0" spc="384">
+              <a:rPr sz="1425" i="0" b="0" spc="456">
                 <a:solidFill>
                   <a:srgbClr val="A1A2A3"/>
                 </a:solidFill>
@@ -3787,7 +3787,7 @@
         <p:spPr>
           <a:xfrm>
             <a:off x="762000" y="3238500"/>
-            <a:ext cx="14401800" cy="228600"/>
+            <a:ext cx="14401800" cy="238125"/>
           </a:xfrm>
           <a:prstGeom prst="rect">
             <a:avLst/>
@@ -3800,7 +3800,7 @@
           <a:p>
             <a:pPr algn="l"/>
             <a:r>
-              <a:rPr sz="1575" i="0" b="0" spc="472">
+              <a:rPr sz="1650" i="0" b="0" spc="462">
                 <a:solidFill>
                   <a:srgbClr val="2D5BE3"/>
                 </a:solidFill>
@@ -3821,7 +3821,7 @@
         </p:nvSpPr>
         <p:spPr>
           <a:xfrm>
-            <a:off x="762000" y="3552825"/>
+            <a:off x="762000" y="3562350"/>
             <a:ext cx="6796564" cy="1152525"/>
           </a:xfrm>
           <a:prstGeom prst="rect">
@@ -3860,7 +3860,7 @@
         </p:nvSpPr>
         <p:spPr>
           <a:xfrm>
-            <a:off x="762000" y="4499223"/>
+            <a:off x="762000" y="4508748"/>
             <a:ext cx="9440704" cy="1152525"/>
           </a:xfrm>
           <a:prstGeom prst="rect">
@@ -3899,8 +3899,8 @@
         </p:nvSpPr>
         <p:spPr>
           <a:xfrm>
-            <a:off x="762000" y="6569571"/>
-            <a:ext cx="1280398" cy="180975"/>
+            <a:off x="762000" y="6550521"/>
+            <a:ext cx="1448991" cy="209550"/>
           </a:xfrm>
           <a:prstGeom prst="rect">
             <a:avLst/>
@@ -3913,7 +3913,7 @@
           <a:p>
             <a:pPr algn="l"/>
             <a:r>
-              <a:rPr sz="1200" i="0" b="0" spc="384">
+              <a:rPr sz="1425" i="0" b="0" spc="456">
                 <a:solidFill>
                   <a:srgbClr val="2D5BE3"/>
                 </a:solidFill>
@@ -3934,7 +3934,7 @@
         </p:nvSpPr>
         <p:spPr>
           <a:xfrm>
-            <a:off x="6728817" y="6369546"/>
+            <a:off x="6728817" y="6379071"/>
             <a:ext cx="4854892" cy="428625"/>
           </a:xfrm>
           <a:prstGeom prst="rect">
@@ -3969,8 +3969,8 @@
         </p:nvSpPr>
         <p:spPr>
           <a:xfrm>
-            <a:off x="762000" y="7503021"/>
-            <a:ext cx="1505188" cy="180975"/>
+            <a:off x="762000" y="7483971"/>
+            <a:ext cx="1716167" cy="209550"/>
           </a:xfrm>
           <a:prstGeom prst="rect">
             <a:avLst/>
@@ -3983,7 +3983,7 @@
           <a:p>
             <a:pPr algn="l"/>
             <a:r>
-              <a:rPr sz="1200" i="0" b="0" spc="384">
+              <a:rPr sz="1425" i="0" b="0" spc="456">
                 <a:solidFill>
                   <a:srgbClr val="2D5BE3"/>
                 </a:solidFill>
@@ -4004,7 +4004,7 @@
         </p:nvSpPr>
         <p:spPr>
           <a:xfrm>
-            <a:off x="5621982" y="7302996"/>
+            <a:off x="5621982" y="7312521"/>
             <a:ext cx="6625828" cy="428625"/>
           </a:xfrm>
           <a:prstGeom prst="rect">
@@ -4039,8 +4039,8 @@
         </p:nvSpPr>
         <p:spPr>
           <a:xfrm>
-            <a:off x="762000" y="8436471"/>
-            <a:ext cx="830818" cy="180975"/>
+            <a:off x="762000" y="8417421"/>
+            <a:ext cx="915114" cy="209550"/>
           </a:xfrm>
           <a:prstGeom prst="rect">
             <a:avLst/>
@@ -4053,7 +4053,7 @@
           <a:p>
             <a:pPr algn="l"/>
             <a:r>
-              <a:rPr sz="1200" i="0" b="0" spc="384">
+              <a:rPr sz="1425" i="0" b="0" spc="456">
                 <a:solidFill>
                   <a:srgbClr val="2D5BE3"/>
                 </a:solidFill>
@@ -4074,7 +4074,7 @@
         </p:nvSpPr>
         <p:spPr>
           <a:xfrm>
-            <a:off x="7019776" y="8236446"/>
+            <a:off x="7019776" y="8245971"/>
             <a:ext cx="4389358" cy="428625"/>
           </a:xfrm>
           <a:prstGeom prst="rect">
@@ -4109,8 +4109,8 @@
         </p:nvSpPr>
         <p:spPr>
           <a:xfrm>
-            <a:off x="762000" y="9369921"/>
-            <a:ext cx="1055608" cy="180975"/>
+            <a:off x="762000" y="9350871"/>
+            <a:ext cx="1182052" cy="209550"/>
           </a:xfrm>
           <a:prstGeom prst="rect">
             <a:avLst/>
@@ -4123,7 +4123,7 @@
           <a:p>
             <a:pPr algn="l"/>
             <a:r>
-              <a:rPr sz="1200" i="0" b="0" spc="384">
+              <a:rPr sz="1425" i="0" b="0" spc="456">
                 <a:solidFill>
                   <a:srgbClr val="2D5BE3"/>
                 </a:solidFill>
@@ -4144,7 +4144,7 @@
         </p:nvSpPr>
         <p:spPr>
           <a:xfrm>
-            <a:off x="6898332" y="9169896"/>
+            <a:off x="6898332" y="9179421"/>
             <a:ext cx="4583668" cy="428625"/>
           </a:xfrm>
           <a:prstGeom prst="rect">
@@ -4179,7 +4179,7 @@
         </p:nvSpPr>
         <p:spPr>
           <a:xfrm>
-            <a:off x="-4876800" y="10198596"/>
+            <a:off x="-4876800" y="10208121"/>
             <a:ext cx="14401800" cy="285750"/>
           </a:xfrm>
           <a:prstGeom prst="rect">
@@ -4218,8 +4218,8 @@
         </p:nvSpPr>
         <p:spPr>
           <a:xfrm>
-            <a:off x="-4876800" y="10560546"/>
-            <a:ext cx="14401800" cy="180975"/>
+            <a:off x="-4876800" y="10570071"/>
+            <a:ext cx="14401800" cy="209550"/>
           </a:xfrm>
           <a:prstGeom prst="rect">
             <a:avLst/>
@@ -4232,7 +4232,7 @@
           <a:p>
             <a:pPr algn="r"/>
             <a:r>
-              <a:rPr sz="1200" i="0" b="0" spc="384">
+              <a:rPr sz="1425" i="0" b="0" spc="456">
                 <a:solidFill>
                   <a:srgbClr val="B8B9BA"/>
                 </a:solidFill>
@@ -4253,8 +4253,8 @@
         </p:nvSpPr>
         <p:spPr>
           <a:xfrm>
-            <a:off x="1314450" y="15825788"/>
-            <a:ext cx="2235994" cy="257175"/>
+            <a:off x="1314450" y="15782925"/>
+            <a:ext cx="2558653" cy="295275"/>
           </a:xfrm>
           <a:prstGeom prst="rect">
             <a:avLst/>
@@ -4267,7 +4267,7 @@
           <a:p>
             <a:pPr algn="l"/>
             <a:r>
-              <a:rPr sz="1725" i="0" b="1" spc="34">
+              <a:rPr sz="2025" i="0" b="1" spc="40">
                 <a:solidFill>
                   <a:srgbClr val="FFFFFF"/>
                 </a:solidFill>
@@ -4288,8 +4288,8 @@
         </p:nvSpPr>
         <p:spPr>
           <a:xfrm>
-            <a:off x="9001125" y="15821025"/>
-            <a:ext cx="685800" cy="266700"/>
+            <a:off x="8972550" y="15773400"/>
+            <a:ext cx="731520" cy="314325"/>
           </a:xfrm>
           <a:prstGeom prst="rect">
             <a:avLst/>
@@ -4302,7 +4302,7 @@
           <a:p>
             <a:pPr algn="l"/>
             <a:r>
-              <a:rPr sz="1800" i="0" b="0">
+              <a:rPr sz="2100" i="0" b="0">
                 <a:solidFill>
                   <a:srgbClr val="2D5BE3"/>
                 </a:solidFill>
@@ -4323,8 +4323,8 @@
         </p:nvSpPr>
         <p:spPr>
           <a:xfrm>
-            <a:off x="1468041" y="17249775"/>
-            <a:ext cx="7350919" cy="180975"/>
+            <a:off x="814626" y="17221200"/>
+            <a:ext cx="8657749" cy="209550"/>
           </a:xfrm>
           <a:prstGeom prst="rect">
             <a:avLst/>
@@ -4337,7 +4337,7 @@
           <a:p>
             <a:pPr algn="ctr"/>
             <a:r>
-              <a:rPr sz="1200" i="0" b="0" spc="384">
+              <a:rPr sz="1425" i="0" b="0" spc="456">
                 <a:solidFill>
                   <a:srgbClr val="B8B9BA"/>
                 </a:solidFill>
